--- a/public/fun/pack/pptx/birthdaypro/돌잔치프리미엄_22_돌잡이중심_네온아쿠아.pptx
+++ b/public/fun/pack/pptx/birthdaypro/돌잔치프리미엄_22_돌잡이중심_네온아쿠아.pptx
@@ -112,12 +112,12 @@
   <p:extLst>
     <p:ext uri="{521415D9-36F7-43E2-AB2F-B90AF26B5E84}">
       <p14:sectionLst xmlns:p14="http://schemas.microsoft.com/office/powerpoint/2010/main">
-        <p14:section name="시작" id="{757826DE-BC21-4F08-B113-506DEE419D85}">
+        <p14:section name="시작" id="{59BEA5C3-A9B9-4F96-B61F-A96CEF503C8A}">
           <p14:sldIdLst>
             <p14:sldId id="256"/>
           </p14:sldIdLst>
         </p14:section>
-        <p14:section name="본문" id="{AA71EF9D-86A7-4C77-B122-20E75CBAF6A8}">
+        <p14:section name="본문" id="{74C3C146-7313-425D-9BA1-4437DA4905AD}">
           <p14:sldIdLst>
             <p14:sldId id="257"/>
             <p14:sldId id="258"/>
@@ -125,7 +125,7 @@
             <p14:sldId id="260"/>
           </p14:sldIdLst>
         </p14:section>
-        <p14:section name="마무리" id="{951F421B-CC21-4CE6-952F-D00F63FA5981}">
+        <p14:section name="마무리" id="{CF75E114-5A60-49CB-9956-F37C84425EB2}">
           <p14:sldIdLst>
             <p14:sldId id="261"/>
           </p14:sldIdLst>
@@ -2968,7 +2968,7 @@
             </a:lvl1pPr>
           </a:lstStyle>
           <a:p>
-            <a:fld id="{87ECD1EE-1D62-4D76-B1F7-36473ED0E898}" type="slidenum">
+            <a:fld id="{14B0AA80-EF59-42CD-B708-02C45F31071B}" type="slidenum">
               <a:rPr lang="en-US"/>
               <a:t>‹#›</a:t>
             </a:fld>
@@ -5097,7 +5097,7 @@
             </a:lvl1pPr>
           </a:lstStyle>
           <a:p>
-            <a:fld id="{17551AC5-3FAB-4A67-9676-FD267FBC0861}" type="slidenum">
+            <a:fld id="{46E77DC4-5275-4CF1-82FF-7BFF290AD8B4}" type="slidenum">
               <a:rPr lang="en-US"/>
               <a:t>‹#›</a:t>
             </a:fld>
@@ -5726,7 +5726,7 @@
             </a:lvl1pPr>
           </a:lstStyle>
           <a:p>
-            <a:fld id="{3A17AC85-2D50-49EC-B637-089223C7BC97}" type="slidenum">
+            <a:fld id="{2636B08E-5B14-4CCB-92D2-38BFED9CC93A}" type="slidenum">
               <a:rPr lang="en-US"/>
               <a:t>‹#›</a:t>
             </a:fld>
@@ -6579,7 +6579,7 @@
           <a:p>
             <a:r>
               <a:rPr lang="ko-KR"/>
-              <a:t>아기 이름 · 0000. 00. 00</a:t>
+              <a:t>아기 이름 · 날짜 입력</a:t>
             </a:r>
           </a:p>
           <a:p>
@@ -6739,7 +6739,7 @@
           <a:bodyPr/>
           <a:lstStyle/>
           <a:p>
-            <a:fld id="{B49774E9-BF6F-4BB8-9FF7-2B287377959C}" type="slidenum">
+            <a:fld id="{DB9953A7-8F1B-45D8-A97A-A49102EBD46E}" type="slidenum">
               <a:rPr lang="en-US"/>
               <a:t>‹#›</a:t>
             </a:fld>
@@ -7339,7 +7339,7 @@
           <a:bodyPr/>
           <a:lstStyle/>
           <a:p>
-            <a:fld id="{BADFEDE8-2AF1-4A17-ADD6-D1FE5BD6AF47}" type="slidenum">
+            <a:fld id="{991B9D4F-209F-4B30-8A7F-7FA943606560}" type="slidenum">
               <a:rPr lang="en-US"/>
               <a:t>‹#›</a:t>
             </a:fld>
@@ -8610,7 +8610,7 @@
           <a:bodyPr/>
           <a:lstStyle/>
           <a:p>
-            <a:fld id="{F9D6370D-1B82-4F29-B30F-F99C3B95D600}" type="slidenum">
+            <a:fld id="{75E28CD5-4DD5-4BA6-95DD-D786B7F3AECD}" type="slidenum">
               <a:rPr lang="en-US"/>
               <a:t>‹#›</a:t>
             </a:fld>
@@ -9383,7 +9383,7 @@
           <a:bodyPr/>
           <a:lstStyle/>
           <a:p>
-            <a:fld id="{BDC2047B-9AE5-47D9-BBCA-44C202F2E244}" type="slidenum">
+            <a:fld id="{0BB561A5-D0A4-4E54-8B99-63C7A3D15413}" type="slidenum">
               <a:rPr lang="en-US"/>
               <a:t>‹#›</a:t>
             </a:fld>
